--- a/Telecom Egypt Intelligent Assistant.pptx
+++ b/Telecom Egypt Intelligent Assistant.pptx
@@ -6344,16 +6344,6 @@
             <a:br>
               <a:rPr lang="en-US" dirty="0" smtClean="0"/>
             </a:br>
-            <a:r>
-              <a:rPr lang="en-US" sz="4400" dirty="0" smtClean="0">
-                <a:solidFill>
-                  <a:schemeClr val="accent2">
-                    <a:lumMod val="50000"/>
-                  </a:schemeClr>
-                </a:solidFill>
-              </a:rPr>
-              <a:t>Mohamed Mostafa</a:t>
-            </a:r>
             <a:endParaRPr lang="en-US" sz="4400" dirty="0">
               <a:solidFill>
                 <a:schemeClr val="accent2">
